--- a/docs/slides/Causa-slides.pptx
+++ b/docs/slides/Causa-slides.pptx
@@ -509,7 +509,7 @@
           <a:p>
             <a:r>
               <a:rPr lang="en-US" dirty="0"/>
-              <a:t>Hi, I'm Paras. This is Causa, for the Open Agent Hackathon, track two: the agent that can explain why. You ask why a number moved, and you get an answer you can check. Four agents investigate revenue changes across an ERP and a CRM, and every claim cites the SQL behind it.</a:t>
+              <a:t>Hi, we're Paras and Harshita. This is Causa, for the Open Agent Hackathon, track two: the agent that can explain why. You ask why a number moved, and you get an answer you can check. Four agents investigate revenue changes across an ERP and a CRM, and every claim cites the SQL behind it.</a:t>
             </a:r>
             <a:endParaRPr lang="en-US" dirty="0"/>
           </a:p>
